--- a/en/slides/04-Computer_Architecture-Digital_Information-Lab.pptx
+++ b/en/slides/04-Computer_Architecture-Digital_Information-Lab.pptx
@@ -119,30 +119,30 @@
   <p:extLst>
     <p:ext uri="{521415D9-36F7-43E2-AB2F-B90AF26B5E84}">
       <p14:sectionLst xmlns:p14="http://schemas.microsoft.com/office/powerpoint/2010/main">
-        <p14:section name="Opening" id="{eb453015-560c-b657-e398-3f1a47340671}">
+        <p14:section name="Opening" id="{b1067d8c-f377-9114-e2f0-37a26a56628c}">
           <p14:sldIdLst>
             <p14:sldId id="256"/>
             <p14:sldId id="257"/>
           </p14:sldIdLst>
         </p14:section>
-        <p14:section name="Data structures" id="{7e2f217c-d5dd-23e0-fe19-e6577d56c3d1}">
+        <p14:section name="Data structures" id="{cb225f0f-0ee4-8e57-4db6-1c704dafbea1}">
           <p14:sldIdLst>
             <p14:sldId id="258"/>
           </p14:sldIdLst>
         </p14:section>
-        <p14:section name="Data and algorithms" id="{54d2f7db-4eb3-62d3-8f18-04b4eb59e034}">
+        <p14:section name="Data and algorithms" id="{dc02fa9f-d4d5-57c5-d344-3ec68f46d603}">
           <p14:sldIdLst>
             <p14:sldId id="259"/>
           </p14:sldIdLst>
         </p14:section>
-        <p14:section name="The complete program" id="{67799fb3-ac86-6b3b-51a0-3afe5ed6f834}">
+        <p14:section name="The complete program" id="{cecc6442-ed05-2058-2815-9512c17fcf34}">
           <p14:sldIdLst>
             <p14:sldId id="260"/>
             <p14:sldId id="261"/>
             <p14:sldId id="262"/>
           </p14:sldIdLst>
         </p14:section>
-        <p14:section name="Run it and test it" id="{361a0b23-5614-5ba5-77a2-18333c78396e}">
+        <p14:section name="Run it and test it" id="{bd2fa6b4-33ff-8a68-63f7-c5bd5dbd5ac2}">
           <p14:sldIdLst>
             <p14:sldId id="263"/>
             <p14:sldId id="264"/>
@@ -151,7 +151,7 @@
             <p14:sldId id="267"/>
           </p14:sldIdLst>
         </p14:section>
-        <p14:section name="Exercises" id="{d281edec-61ca-18ef-3ca3-19dd154d7b52}">
+        <p14:section name="Exercises" id="{9edb25d9-e6fd-0ff7-6952-60eb9e058b7e}">
           <p14:sldIdLst>
             <p14:sldId id="268"/>
           </p14:sldIdLst>

--- a/en/slides/04-Computer_Architecture-Digital_Information-Lab.pptx
+++ b/en/slides/04-Computer_Architecture-Digital_Information-Lab.pptx
@@ -119,30 +119,30 @@
   <p:extLst>
     <p:ext uri="{521415D9-36F7-43E2-AB2F-B90AF26B5E84}">
       <p14:sectionLst xmlns:p14="http://schemas.microsoft.com/office/powerpoint/2010/main">
-        <p14:section name="Opening" id="{b1067d8c-f377-9114-e2f0-37a26a56628c}">
+        <p14:section name="Opening" id="{2fb61aef-051d-cc21-d38c-8824485e38ab}">
           <p14:sldIdLst>
             <p14:sldId id="256"/>
             <p14:sldId id="257"/>
           </p14:sldIdLst>
         </p14:section>
-        <p14:section name="Data structures" id="{cb225f0f-0ee4-8e57-4db6-1c704dafbea1}">
+        <p14:section name="Data structures" id="{72b63273-a456-16aa-f153-1d17826c9681}">
           <p14:sldIdLst>
             <p14:sldId id="258"/>
           </p14:sldIdLst>
         </p14:section>
-        <p14:section name="Data and algorithms" id="{dc02fa9f-d4d5-57c5-d344-3ec68f46d603}">
+        <p14:section name="Data and algorithms" id="{bb8113df-5258-8d46-a76c-475888074ad4}">
           <p14:sldIdLst>
             <p14:sldId id="259"/>
           </p14:sldIdLst>
         </p14:section>
-        <p14:section name="The complete program" id="{cecc6442-ed05-2058-2815-9512c17fcf34}">
+        <p14:section name="The complete program" id="{610e86b1-a140-1fac-5877-660ba940d8b1}">
           <p14:sldIdLst>
             <p14:sldId id="260"/>
             <p14:sldId id="261"/>
             <p14:sldId id="262"/>
           </p14:sldIdLst>
         </p14:section>
-        <p14:section name="Run it and test it" id="{bd2fa6b4-33ff-8a68-63f7-c5bd5dbd5ac2}">
+        <p14:section name="Run it and test it" id="{fe61e769-d898-e1eb-802e-4723ca5e76ef}">
           <p14:sldIdLst>
             <p14:sldId id="263"/>
             <p14:sldId id="264"/>
@@ -151,7 +151,7 @@
             <p14:sldId id="267"/>
           </p14:sldIdLst>
         </p14:section>
-        <p14:section name="Exercises" id="{9edb25d9-e6fd-0ff7-6952-60eb9e058b7e}">
+        <p14:section name="Exercises" id="{badb1042-1aba-6715-ecc3-24f1f0d2cd6e}">
           <p14:sldIdLst>
             <p14:sldId id="268"/>
           </p14:sldIdLst>
@@ -562,7 +562,9 @@
               <a:rPr lang="en-US" dirty="0"/>
               <a:t>This is the code deck of Lecture 04. Where the lecture deck develops the concepts, this deck contains everything that is written and executed: each listing with its commentary, the complete program of the lecture, the output it is expected to produce, and the procedure for testing it on each of the three hosts. The two decks are meant to be read together: the concepts explain the code, and the code gives the concepts an observable consequence.
 Learning status: UNDERSTAND NOW, by the end of this lecture you explain it, trace it and apply it on your own; USE NOW, you follow and use the recipe today; how it works inside is explained later, or is not part of the course; UNDERSTAND LATER, recognise the name and what it is for; a later lecture explains it. A slide without a badge is context: a story, an example, a question, an exercise.
-Learning status of this lecture. UNDERSTAND NOW: analog and digital; bit, byte, word; hexadecimal; positional notation; a colour is a number; characters and strings; little-endian byte order; data structures; arrays in memory; algorithms. USE NOW: shifts as multiplications (Lecture 05) and, used without being studied in this course, the complete program, the PRG32 tools. UNDERSTAND LATER: nothing. A slide without a badge is context: a story, an example, a question, an exercise.</a:t>
+Learning status of this lecture. UNDERSTAND NOW: analog and digital; bit, byte, word; hexadecimal; positional notation; a colour is a number; characters and strings; little-endian byte order; data structures; arrays in memory; algorithms. USE NOW: shifts as multiplications (Lecture 05) and, used without being studied in this course, the complete program, the PRG32 tools. UNDERSTAND LATER: nothing. A slide without a badge is context: a story, an example, a question, an exercise.
+Roadmap. Today's outcomes: (1) distinguish analog from digital information and count the values that n bits can represent; (2) encode numbers, colours and text as bits: positional notation, hexadecimal, RGB565, ASCII; (3) name the basic data structures and the properties of an algorithm. Builds on: only what Lecture 01 set up. Next: Lecture 05, Number Representation: Integers.
+Bridge. In Lecture 02 the instruction addi t1, t1, 1 appeared in memory as the word 0x00130313. Today the same 32 bits can be read as a number, a colour, four letters or an instruction: the code decides. Lecture 19 reads the instruction field by field. Recall: Name two different things one 32-bit word can mean, and what decides which meaning applies.</a:t>
             </a:r>
             <a:endParaRPr lang="en-US" dirty="0"/>
           </a:p>
